--- a/maven_training/pdf/MSS_Training_Progression.pptx
+++ b/maven_training/pdf/MSS_Training_Progression.pptx
@@ -5062,292 +5062,20 @@
       </p:sp>
       <p:sp>
         <p:nvSpPr>
-          <p:cNvPr id="55" name="TextBox 54"/>
-          <p:cNvSpPr txBox="1"/>
-          <p:nvPr/>
-        </p:nvSpPr>
-        <p:spPr>
-          <a:xfrm>
-            <a:off x="9820656" y="1197864"/>
-            <a:ext cx="2185415" cy="384048"/>
-          </a:xfrm>
-          <a:prstGeom prst="rect">
-            <a:avLst/>
-          </a:prstGeom>
-          <a:noFill/>
-        </p:spPr>
-        <p:txBody>
-          <a:bodyPr wrap="square">
-            <a:spAutoFit/>
-          </a:bodyPr>
-          <a:lstStyle/>
-          <a:p>
-            <a:pPr algn="ctr"/>
-            <a:r>
-              <a:rPr sz="900" b="1">
-                <a:solidFill>
-                  <a:srgbClr val="FFFFFF"/>
-                </a:solidFill>
-              </a:rPr>
-              <a:t>SPECIALIST TRACKS</a:t>
-            </a:r>
-          </a:p>
-        </p:txBody>
-      </p:sp>
-      <p:sp>
-        <p:nvSpPr>
-          <p:cNvPr id="56" name="TextBox 55"/>
-          <p:cNvSpPr txBox="1"/>
-          <p:nvPr/>
-        </p:nvSpPr>
-        <p:spPr>
-          <a:xfrm>
-            <a:off x="9912096" y="1737360"/>
-            <a:ext cx="2048255" cy="256032"/>
-          </a:xfrm>
-          <a:prstGeom prst="rect">
-            <a:avLst/>
-          </a:prstGeom>
-          <a:noFill/>
-        </p:spPr>
-        <p:txBody>
-          <a:bodyPr wrap="square">
-            <a:spAutoFit/>
-          </a:bodyPr>
-          <a:lstStyle/>
-          <a:p>
-            <a:pPr algn="l"/>
-            <a:r>
-              <a:rPr sz="800" b="1">
-                <a:solidFill>
-                  <a:srgbClr val="2E3A18"/>
-                </a:solidFill>
-              </a:rPr>
-              <a:t>TM-40 SERIES  (Prereq: TM-30)</a:t>
-            </a:r>
-          </a:p>
-        </p:txBody>
-      </p:sp>
-      <p:sp>
-        <p:nvSpPr>
-          <p:cNvPr id="57" name="TextBox 56"/>
-          <p:cNvSpPr txBox="1"/>
-          <p:nvPr/>
-        </p:nvSpPr>
-        <p:spPr>
-          <a:xfrm>
-            <a:off x="9957816" y="2057400"/>
-            <a:ext cx="2002535" cy="347472"/>
-          </a:xfrm>
-          <a:prstGeom prst="rect">
-            <a:avLst/>
-          </a:prstGeom>
-          <a:noFill/>
-        </p:spPr>
-        <p:txBody>
-          <a:bodyPr wrap="square">
-            <a:spAutoFit/>
-          </a:bodyPr>
-          <a:lstStyle/>
-          <a:p>
-            <a:pPr algn="l"/>
-            <a:r>
-              <a:rPr sz="800" b="0">
-                <a:solidFill>
-                  <a:srgbClr val="404040"/>
-                </a:solidFill>
-              </a:rPr>
-              <a:t>· TM-40A  ORSA</a:t>
-            </a:r>
-          </a:p>
-        </p:txBody>
-      </p:sp>
-      <p:sp>
-        <p:nvSpPr>
-          <p:cNvPr id="58" name="TextBox 57"/>
-          <p:cNvSpPr txBox="1"/>
-          <p:nvPr/>
-        </p:nvSpPr>
-        <p:spPr>
-          <a:xfrm>
-            <a:off x="9957816" y="2441448"/>
-            <a:ext cx="2002535" cy="347472"/>
-          </a:xfrm>
-          <a:prstGeom prst="rect">
-            <a:avLst/>
-          </a:prstGeom>
-          <a:noFill/>
-        </p:spPr>
-        <p:txBody>
-          <a:bodyPr wrap="square">
-            <a:spAutoFit/>
-          </a:bodyPr>
-          <a:lstStyle/>
-          <a:p>
-            <a:pPr algn="l"/>
-            <a:r>
-              <a:rPr sz="800" b="0">
-                <a:solidFill>
-                  <a:srgbClr val="404040"/>
-                </a:solidFill>
-              </a:rPr>
-              <a:t>· TM-40B  AI Engineer</a:t>
-            </a:r>
-          </a:p>
-        </p:txBody>
-      </p:sp>
-      <p:sp>
-        <p:nvSpPr>
-          <p:cNvPr id="59" name="TextBox 58"/>
-          <p:cNvSpPr txBox="1"/>
-          <p:nvPr/>
-        </p:nvSpPr>
-        <p:spPr>
-          <a:xfrm>
-            <a:off x="9957816" y="2825496"/>
-            <a:ext cx="2002535" cy="347472"/>
-          </a:xfrm>
-          <a:prstGeom prst="rect">
-            <a:avLst/>
-          </a:prstGeom>
-          <a:noFill/>
-        </p:spPr>
-        <p:txBody>
-          <a:bodyPr wrap="square">
-            <a:spAutoFit/>
-          </a:bodyPr>
-          <a:lstStyle/>
-          <a:p>
-            <a:pPr algn="l"/>
-            <a:r>
-              <a:rPr sz="800" b="0">
-                <a:solidFill>
-                  <a:srgbClr val="404040"/>
-                </a:solidFill>
-              </a:rPr>
-              <a:t>· TM-40C  ML Engineer</a:t>
-            </a:r>
-          </a:p>
-        </p:txBody>
-      </p:sp>
-      <p:sp>
-        <p:nvSpPr>
-          <p:cNvPr id="60" name="TextBox 59"/>
-          <p:cNvSpPr txBox="1"/>
-          <p:nvPr/>
-        </p:nvSpPr>
-        <p:spPr>
-          <a:xfrm>
-            <a:off x="9957816" y="3209544"/>
-            <a:ext cx="2002535" cy="347472"/>
-          </a:xfrm>
-          <a:prstGeom prst="rect">
-            <a:avLst/>
-          </a:prstGeom>
-          <a:noFill/>
-        </p:spPr>
-        <p:txBody>
-          <a:bodyPr wrap="square">
-            <a:spAutoFit/>
-          </a:bodyPr>
-          <a:lstStyle/>
-          <a:p>
-            <a:pPr algn="l"/>
-            <a:r>
-              <a:rPr sz="800" b="0">
-                <a:solidFill>
-                  <a:srgbClr val="404040"/>
-                </a:solidFill>
-              </a:rPr>
-              <a:t>· TM-40D  Program Manager</a:t>
-            </a:r>
-          </a:p>
-        </p:txBody>
-      </p:sp>
-      <p:sp>
-        <p:nvSpPr>
-          <p:cNvPr id="61" name="TextBox 60"/>
-          <p:cNvSpPr txBox="1"/>
-          <p:nvPr/>
-        </p:nvSpPr>
-        <p:spPr>
-          <a:xfrm>
-            <a:off x="9957816" y="3593591"/>
-            <a:ext cx="2002535" cy="347472"/>
-          </a:xfrm>
-          <a:prstGeom prst="rect">
-            <a:avLst/>
-          </a:prstGeom>
-          <a:noFill/>
-        </p:spPr>
-        <p:txBody>
-          <a:bodyPr wrap="square">
-            <a:spAutoFit/>
-          </a:bodyPr>
-          <a:lstStyle/>
-          <a:p>
-            <a:pPr algn="l"/>
-            <a:r>
-              <a:rPr sz="800" b="0">
-                <a:solidFill>
-                  <a:srgbClr val="404040"/>
-                </a:solidFill>
-              </a:rPr>
-              <a:t>· TM-40E  Knowledge Manager</a:t>
-            </a:r>
-          </a:p>
-        </p:txBody>
-      </p:sp>
-      <p:sp>
-        <p:nvSpPr>
-          <p:cNvPr id="62" name="TextBox 61"/>
-          <p:cNvSpPr txBox="1"/>
-          <p:nvPr/>
-        </p:nvSpPr>
-        <p:spPr>
-          <a:xfrm>
-            <a:off x="9957816" y="3977639"/>
-            <a:ext cx="2002535" cy="347472"/>
-          </a:xfrm>
-          <a:prstGeom prst="rect">
-            <a:avLst/>
-          </a:prstGeom>
-          <a:noFill/>
-        </p:spPr>
-        <p:txBody>
-          <a:bodyPr wrap="square">
-            <a:spAutoFit/>
-          </a:bodyPr>
-          <a:lstStyle/>
-          <a:p>
-            <a:pPr algn="l"/>
-            <a:r>
-              <a:rPr sz="800" b="0">
-                <a:solidFill>
-                  <a:srgbClr val="404040"/>
-                </a:solidFill>
-              </a:rPr>
-              <a:t>· TM-40F  Software Engineer</a:t>
-            </a:r>
-          </a:p>
-        </p:txBody>
-      </p:sp>
-      <p:sp>
-        <p:nvSpPr>
-          <p:cNvPr id="63" name="Rectangle 62"/>
+          <p:cNvPr id="66" name="Rectangle 65"/>
           <p:cNvSpPr/>
           <p:nvPr/>
         </p:nvSpPr>
         <p:spPr>
           <a:xfrm>
-            <a:off x="9912096" y="4480560"/>
-            <a:ext cx="2002535" cy="36576"/>
+            <a:off x="0" y="6565392"/>
+            <a:ext cx="12188952" cy="292608"/>
           </a:xfrm>
           <a:prstGeom prst="rect">
             <a:avLst/>
           </a:prstGeom>
           <a:solidFill>
-            <a:srgbClr val="A0A0A0"/>
+            <a:srgbClr val="2E3A18"/>
           </a:solidFill>
           <a:ln>
             <a:noFill/>
@@ -5377,14 +5105,14 @@
       </p:sp>
       <p:sp>
         <p:nvSpPr>
-          <p:cNvPr id="64" name="TextBox 63"/>
+          <p:cNvPr id="67" name="TextBox 66"/>
           <p:cNvSpPr txBox="1"/>
           <p:nvPr/>
         </p:nvSpPr>
         <p:spPr>
           <a:xfrm>
-            <a:off x="9912096" y="4599431"/>
-            <a:ext cx="2048255" cy="256032"/>
+            <a:off x="182880" y="6574536"/>
+            <a:ext cx="8229600" cy="256032"/>
           </a:xfrm>
           <a:prstGeom prst="rect">
             <a:avLst/>
@@ -5397,28 +5125,28 @@
           </a:bodyPr>
           <a:lstStyle/>
           <a:p>
-            <a:pPr algn="l"/>
-            <a:r>
-              <a:rPr sz="800" b="1">
-                <a:solidFill>
-                  <a:srgbClr val="2E3A18"/>
+            <a:pPr algn="ctr"/>
+            <a:r>
+              <a:rPr sz="700" b="0">
+                <a:solidFill>
+                  <a:srgbClr val="A0A0A0"/>
                 </a:solidFill>
               </a:rPr>
-              <a:t>TM-50 SERIES  (Prereq: TM-40)</a:t>
-            </a:r>
-          </a:p>
-        </p:txBody>
-      </p:sp>
-      <p:sp>
-        <p:nvSpPr>
-          <p:cNvPr id="65" name="TextBox 64"/>
+              <a:t>USAREUR-AF OD Team  ·  MSS Training Program  ·  Wiesbaden, Germany</a:t>
+            </a:r>
+          </a:p>
+        </p:txBody>
+      </p:sp>
+      <p:sp>
+        <p:nvSpPr>
+          <p:cNvPr id="68" name="TextBox 67"/>
           <p:cNvSpPr txBox="1"/>
           <p:nvPr/>
         </p:nvSpPr>
         <p:spPr>
           <a:xfrm>
-            <a:off x="9912096" y="4910328"/>
-            <a:ext cx="2048255" cy="1097280"/>
+            <a:off x="9601200" y="6574536"/>
+            <a:ext cx="2377440" cy="256032"/>
           </a:xfrm>
           <a:prstGeom prst="rect">
             <a:avLst/>
@@ -5431,38 +5159,612 @@
           </a:bodyPr>
           <a:lstStyle/>
           <a:p>
+            <a:pPr algn="ctr"/>
+            <a:r>
+              <a:rPr sz="700" b="1">
+                <a:solidFill>
+                  <a:srgbClr val="FFC325"/>
+                </a:solidFill>
+              </a:rPr>
+              <a:t>UNCLASSIFIED</a:t>
+            </a:r>
+          </a:p>
+        </p:txBody>
+      </p:sp>
+      <p:sp>
+        <p:nvSpPr>
+          <p:cNvPr id="69" name="TextBox 68"/>
+          <p:cNvSpPr txBox="1"/>
+          <p:nvPr/>
+        </p:nvSpPr>
+        <p:spPr>
+          <a:xfrm>
+            <a:off x="9866376" y="1175004"/>
+            <a:ext cx="2093976" cy="292608"/>
+          </a:xfrm>
+          <a:prstGeom prst="rect">
+            <a:avLst/>
+          </a:prstGeom>
+          <a:noFill/>
+        </p:spPr>
+        <p:txBody>
+          <a:bodyPr wrap="square">
+            <a:spAutoFit/>
+          </a:bodyPr>
+          <a:lstStyle/>
+          <a:p>
+            <a:pPr algn="ctr"/>
+            <a:r>
+              <a:rPr sz="1100" b="1" i="0">
+                <a:solidFill>
+                  <a:srgbClr val="FFFFFF"/>
+                </a:solidFill>
+              </a:rPr>
+              <a:t>SPECIALIST TRACKS</a:t>
+            </a:r>
+          </a:p>
+        </p:txBody>
+      </p:sp>
+      <p:sp>
+        <p:nvSpPr>
+          <p:cNvPr id="70" name="TextBox 69"/>
+          <p:cNvSpPr txBox="1"/>
+          <p:nvPr/>
+        </p:nvSpPr>
+        <p:spPr>
+          <a:xfrm>
+            <a:off x="9866376" y="1444752"/>
+            <a:ext cx="2093976" cy="201168"/>
+          </a:xfrm>
+          <a:prstGeom prst="rect">
+            <a:avLst/>
+          </a:prstGeom>
+          <a:noFill/>
+        </p:spPr>
+        <p:txBody>
+          <a:bodyPr wrap="square">
+            <a:spAutoFit/>
+          </a:bodyPr>
+          <a:lstStyle/>
+          <a:p>
+            <a:pPr algn="ctr"/>
+            <a:r>
+              <a:rPr sz="800" b="0" i="1">
+                <a:solidFill>
+                  <a:srgbClr val="DDCCAA"/>
+                </a:solidFill>
+              </a:rPr>
+              <a:t>TM-40 &amp; TM-50 Series</a:t>
+            </a:r>
+          </a:p>
+        </p:txBody>
+      </p:sp>
+      <p:sp>
+        <p:nvSpPr>
+          <p:cNvPr id="71" name="TextBox 70"/>
+          <p:cNvSpPr txBox="1"/>
+          <p:nvPr/>
+        </p:nvSpPr>
+        <p:spPr>
+          <a:xfrm>
+            <a:off x="9912096" y="1709928"/>
+            <a:ext cx="2002536" cy="201168"/>
+          </a:xfrm>
+          <a:prstGeom prst="rect">
+            <a:avLst/>
+          </a:prstGeom>
+          <a:noFill/>
+        </p:spPr>
+        <p:txBody>
+          <a:bodyPr wrap="square">
+            <a:spAutoFit/>
+          </a:bodyPr>
+          <a:lstStyle/>
+          <a:p>
             <a:pPr algn="l"/>
             <a:r>
-              <a:rPr sz="750" b="0">
-                <a:solidFill>
-                  <a:srgbClr val="404040"/>
+              <a:rPr sz="850" b="1" i="0">
+                <a:solidFill>
+                  <a:srgbClr val="C8A951"/>
                 </a:solidFill>
               </a:rPr>
-              <a:t>Advanced / expert-level continuation
-for each TM-40 track.
-Focus: production pipelines,
-MLOps, AIP Agents, advanced
-Ontology patterns.</a:t>
-            </a:r>
-          </a:p>
-        </p:txBody>
-      </p:sp>
-      <p:sp>
-        <p:nvSpPr>
-          <p:cNvPr id="66" name="Rectangle 65"/>
+              <a:t>TM-40 SERIES  (Prereq: TM-30)</a:t>
+            </a:r>
+          </a:p>
+        </p:txBody>
+      </p:sp>
+      <p:sp>
+        <p:nvSpPr>
+          <p:cNvPr id="72" name="TextBox 71"/>
+          <p:cNvSpPr txBox="1"/>
+          <p:nvPr/>
+        </p:nvSpPr>
+        <p:spPr>
+          <a:xfrm>
+            <a:off x="9912096" y="1929384"/>
+            <a:ext cx="2002536" cy="182880"/>
+          </a:xfrm>
+          <a:prstGeom prst="rect">
+            <a:avLst/>
+          </a:prstGeom>
+          <a:noFill/>
+        </p:spPr>
+        <p:txBody>
+          <a:bodyPr wrap="square">
+            <a:spAutoFit/>
+          </a:bodyPr>
+          <a:lstStyle/>
+          <a:p>
+            <a:pPr algn="l"/>
+            <a:r>
+              <a:rPr sz="800" b="1" i="0">
+                <a:solidFill>
+                  <a:srgbClr val="1A2F4B"/>
+                </a:solidFill>
+              </a:rPr>
+              <a:t>▸ WFF TRACKS (A–F)</a:t>
+            </a:r>
+          </a:p>
+        </p:txBody>
+      </p:sp>
+      <p:sp>
+        <p:nvSpPr>
+          <p:cNvPr id="73" name="TextBox 72"/>
+          <p:cNvSpPr txBox="1"/>
+          <p:nvPr/>
+        </p:nvSpPr>
+        <p:spPr>
+          <a:xfrm>
+            <a:off x="9985248" y="2125980"/>
+            <a:ext cx="1929384" cy="182880"/>
+          </a:xfrm>
+          <a:prstGeom prst="rect">
+            <a:avLst/>
+          </a:prstGeom>
+          <a:noFill/>
+        </p:spPr>
+        <p:txBody>
+          <a:bodyPr wrap="square">
+            <a:spAutoFit/>
+          </a:bodyPr>
+          <a:lstStyle/>
+          <a:p>
+            <a:pPr algn="l"/>
+            <a:r>
+              <a:rPr sz="800" b="0" i="0">
+                <a:solidFill>
+                  <a:srgbClr val="333333"/>
+                </a:solidFill>
+              </a:rPr>
+              <a:t>· TM-40A  Intelligence (INT)</a:t>
+            </a:r>
+          </a:p>
+        </p:txBody>
+      </p:sp>
+      <p:sp>
+        <p:nvSpPr>
+          <p:cNvPr id="74" name="TextBox 73"/>
+          <p:cNvSpPr txBox="1"/>
+          <p:nvPr/>
+        </p:nvSpPr>
+        <p:spPr>
+          <a:xfrm>
+            <a:off x="9985248" y="2308860"/>
+            <a:ext cx="1929384" cy="182880"/>
+          </a:xfrm>
+          <a:prstGeom prst="rect">
+            <a:avLst/>
+          </a:prstGeom>
+          <a:noFill/>
+        </p:spPr>
+        <p:txBody>
+          <a:bodyPr wrap="square">
+            <a:spAutoFit/>
+          </a:bodyPr>
+          <a:lstStyle/>
+          <a:p>
+            <a:pPr algn="l"/>
+            <a:r>
+              <a:rPr sz="800" b="0" i="0">
+                <a:solidFill>
+                  <a:srgbClr val="333333"/>
+                </a:solidFill>
+              </a:rPr>
+              <a:t>· TM-40B  Fires</a:t>
+            </a:r>
+          </a:p>
+        </p:txBody>
+      </p:sp>
+      <p:sp>
+        <p:nvSpPr>
+          <p:cNvPr id="75" name="TextBox 74"/>
+          <p:cNvSpPr txBox="1"/>
+          <p:nvPr/>
+        </p:nvSpPr>
+        <p:spPr>
+          <a:xfrm>
+            <a:off x="9985248" y="2491740"/>
+            <a:ext cx="1929384" cy="182880"/>
+          </a:xfrm>
+          <a:prstGeom prst="rect">
+            <a:avLst/>
+          </a:prstGeom>
+          <a:noFill/>
+        </p:spPr>
+        <p:txBody>
+          <a:bodyPr wrap="square">
+            <a:spAutoFit/>
+          </a:bodyPr>
+          <a:lstStyle/>
+          <a:p>
+            <a:pPr algn="l"/>
+            <a:r>
+              <a:rPr sz="800" b="0" i="0">
+                <a:solidFill>
+                  <a:srgbClr val="333333"/>
+                </a:solidFill>
+              </a:rPr>
+              <a:t>· TM-40C  Movement &amp; Maneuver</a:t>
+            </a:r>
+          </a:p>
+        </p:txBody>
+      </p:sp>
+      <p:sp>
+        <p:nvSpPr>
+          <p:cNvPr id="76" name="TextBox 75"/>
+          <p:cNvSpPr txBox="1"/>
+          <p:nvPr/>
+        </p:nvSpPr>
+        <p:spPr>
+          <a:xfrm>
+            <a:off x="9985248" y="2674620"/>
+            <a:ext cx="1929384" cy="182880"/>
+          </a:xfrm>
+          <a:prstGeom prst="rect">
+            <a:avLst/>
+          </a:prstGeom>
+          <a:noFill/>
+        </p:spPr>
+        <p:txBody>
+          <a:bodyPr wrap="square">
+            <a:spAutoFit/>
+          </a:bodyPr>
+          <a:lstStyle/>
+          <a:p>
+            <a:pPr algn="l"/>
+            <a:r>
+              <a:rPr sz="800" b="0" i="0">
+                <a:solidFill>
+                  <a:srgbClr val="333333"/>
+                </a:solidFill>
+              </a:rPr>
+              <a:t>· TM-40D  Sustainment</a:t>
+            </a:r>
+          </a:p>
+        </p:txBody>
+      </p:sp>
+      <p:sp>
+        <p:nvSpPr>
+          <p:cNvPr id="77" name="TextBox 76"/>
+          <p:cNvSpPr txBox="1"/>
+          <p:nvPr/>
+        </p:nvSpPr>
+        <p:spPr>
+          <a:xfrm>
+            <a:off x="9985248" y="2857500"/>
+            <a:ext cx="1929384" cy="182880"/>
+          </a:xfrm>
+          <a:prstGeom prst="rect">
+            <a:avLst/>
+          </a:prstGeom>
+          <a:noFill/>
+        </p:spPr>
+        <p:txBody>
+          <a:bodyPr wrap="square">
+            <a:spAutoFit/>
+          </a:bodyPr>
+          <a:lstStyle/>
+          <a:p>
+            <a:pPr algn="l"/>
+            <a:r>
+              <a:rPr sz="800" b="0" i="0">
+                <a:solidFill>
+                  <a:srgbClr val="333333"/>
+                </a:solidFill>
+              </a:rPr>
+              <a:t>· TM-40E  Protection</a:t>
+            </a:r>
+          </a:p>
+        </p:txBody>
+      </p:sp>
+      <p:sp>
+        <p:nvSpPr>
+          <p:cNvPr id="78" name="TextBox 77"/>
+          <p:cNvSpPr txBox="1"/>
+          <p:nvPr/>
+        </p:nvSpPr>
+        <p:spPr>
+          <a:xfrm>
+            <a:off x="9985248" y="3040380"/>
+            <a:ext cx="1929384" cy="182880"/>
+          </a:xfrm>
+          <a:prstGeom prst="rect">
+            <a:avLst/>
+          </a:prstGeom>
+          <a:noFill/>
+        </p:spPr>
+        <p:txBody>
+          <a:bodyPr wrap="square">
+            <a:spAutoFit/>
+          </a:bodyPr>
+          <a:lstStyle/>
+          <a:p>
+            <a:pPr algn="l"/>
+            <a:r>
+              <a:rPr sz="800" b="0" i="0">
+                <a:solidFill>
+                  <a:srgbClr val="333333"/>
+                </a:solidFill>
+              </a:rPr>
+              <a:t>· TM-40F  Mission Command</a:t>
+            </a:r>
+          </a:p>
+        </p:txBody>
+      </p:sp>
+      <p:sp>
+        <p:nvSpPr>
+          <p:cNvPr id="79" name="TextBox 78"/>
+          <p:cNvSpPr txBox="1"/>
+          <p:nvPr/>
+        </p:nvSpPr>
+        <p:spPr>
+          <a:xfrm>
+            <a:off x="9912096" y="3273552"/>
+            <a:ext cx="2002536" cy="182880"/>
+          </a:xfrm>
+          <a:prstGeom prst="rect">
+            <a:avLst/>
+          </a:prstGeom>
+          <a:noFill/>
+        </p:spPr>
+        <p:txBody>
+          <a:bodyPr wrap="square">
+            <a:spAutoFit/>
+          </a:bodyPr>
+          <a:lstStyle/>
+          <a:p>
+            <a:pPr algn="l"/>
+            <a:r>
+              <a:rPr sz="800" b="1" i="0">
+                <a:solidFill>
+                  <a:srgbClr val="1A2F4B"/>
+                </a:solidFill>
+              </a:rPr>
+              <a:t>▸ SPECIALIST (G–L)</a:t>
+            </a:r>
+          </a:p>
+        </p:txBody>
+      </p:sp>
+      <p:sp>
+        <p:nvSpPr>
+          <p:cNvPr id="80" name="TextBox 79"/>
+          <p:cNvSpPr txBox="1"/>
+          <p:nvPr/>
+        </p:nvSpPr>
+        <p:spPr>
+          <a:xfrm>
+            <a:off x="9985248" y="3470148"/>
+            <a:ext cx="1929384" cy="182880"/>
+          </a:xfrm>
+          <a:prstGeom prst="rect">
+            <a:avLst/>
+          </a:prstGeom>
+          <a:noFill/>
+        </p:spPr>
+        <p:txBody>
+          <a:bodyPr wrap="square">
+            <a:spAutoFit/>
+          </a:bodyPr>
+          <a:lstStyle/>
+          <a:p>
+            <a:pPr algn="l"/>
+            <a:r>
+              <a:rPr sz="800" b="0" i="0">
+                <a:solidFill>
+                  <a:srgbClr val="333333"/>
+                </a:solidFill>
+              </a:rPr>
+              <a:t>· TM-40G  ORSA</a:t>
+            </a:r>
+          </a:p>
+        </p:txBody>
+      </p:sp>
+      <p:sp>
+        <p:nvSpPr>
+          <p:cNvPr id="81" name="TextBox 80"/>
+          <p:cNvSpPr txBox="1"/>
+          <p:nvPr/>
+        </p:nvSpPr>
+        <p:spPr>
+          <a:xfrm>
+            <a:off x="9985248" y="3653028"/>
+            <a:ext cx="1929384" cy="182880"/>
+          </a:xfrm>
+          <a:prstGeom prst="rect">
+            <a:avLst/>
+          </a:prstGeom>
+          <a:noFill/>
+        </p:spPr>
+        <p:txBody>
+          <a:bodyPr wrap="square">
+            <a:spAutoFit/>
+          </a:bodyPr>
+          <a:lstStyle/>
+          <a:p>
+            <a:pPr algn="l"/>
+            <a:r>
+              <a:rPr sz="800" b="0" i="0">
+                <a:solidFill>
+                  <a:srgbClr val="333333"/>
+                </a:solidFill>
+              </a:rPr>
+              <a:t>· TM-40H  AI Engineer</a:t>
+            </a:r>
+          </a:p>
+        </p:txBody>
+      </p:sp>
+      <p:sp>
+        <p:nvSpPr>
+          <p:cNvPr id="82" name="TextBox 81"/>
+          <p:cNvSpPr txBox="1"/>
+          <p:nvPr/>
+        </p:nvSpPr>
+        <p:spPr>
+          <a:xfrm>
+            <a:off x="9985248" y="3835908"/>
+            <a:ext cx="1929384" cy="182880"/>
+          </a:xfrm>
+          <a:prstGeom prst="rect">
+            <a:avLst/>
+          </a:prstGeom>
+          <a:noFill/>
+        </p:spPr>
+        <p:txBody>
+          <a:bodyPr wrap="square">
+            <a:spAutoFit/>
+          </a:bodyPr>
+          <a:lstStyle/>
+          <a:p>
+            <a:pPr algn="l"/>
+            <a:r>
+              <a:rPr sz="800" b="0" i="0">
+                <a:solidFill>
+                  <a:srgbClr val="333333"/>
+                </a:solidFill>
+              </a:rPr>
+              <a:t>· TM-40I  ML Engineer</a:t>
+            </a:r>
+          </a:p>
+        </p:txBody>
+      </p:sp>
+      <p:sp>
+        <p:nvSpPr>
+          <p:cNvPr id="83" name="TextBox 82"/>
+          <p:cNvSpPr txBox="1"/>
+          <p:nvPr/>
+        </p:nvSpPr>
+        <p:spPr>
+          <a:xfrm>
+            <a:off x="9985248" y="4018788"/>
+            <a:ext cx="1929384" cy="182880"/>
+          </a:xfrm>
+          <a:prstGeom prst="rect">
+            <a:avLst/>
+          </a:prstGeom>
+          <a:noFill/>
+        </p:spPr>
+        <p:txBody>
+          <a:bodyPr wrap="square">
+            <a:spAutoFit/>
+          </a:bodyPr>
+          <a:lstStyle/>
+          <a:p>
+            <a:pPr algn="l"/>
+            <a:r>
+              <a:rPr sz="800" b="0" i="0">
+                <a:solidFill>
+                  <a:srgbClr val="333333"/>
+                </a:solidFill>
+              </a:rPr>
+              <a:t>· TM-40J  Program Manager</a:t>
+            </a:r>
+          </a:p>
+        </p:txBody>
+      </p:sp>
+      <p:sp>
+        <p:nvSpPr>
+          <p:cNvPr id="84" name="TextBox 83"/>
+          <p:cNvSpPr txBox="1"/>
+          <p:nvPr/>
+        </p:nvSpPr>
+        <p:spPr>
+          <a:xfrm>
+            <a:off x="9985248" y="4201668"/>
+            <a:ext cx="1929384" cy="182880"/>
+          </a:xfrm>
+          <a:prstGeom prst="rect">
+            <a:avLst/>
+          </a:prstGeom>
+          <a:noFill/>
+        </p:spPr>
+        <p:txBody>
+          <a:bodyPr wrap="square">
+            <a:spAutoFit/>
+          </a:bodyPr>
+          <a:lstStyle/>
+          <a:p>
+            <a:pPr algn="l"/>
+            <a:r>
+              <a:rPr sz="800" b="0" i="0">
+                <a:solidFill>
+                  <a:srgbClr val="333333"/>
+                </a:solidFill>
+              </a:rPr>
+              <a:t>· TM-40K  Knowledge Mgr</a:t>
+            </a:r>
+          </a:p>
+        </p:txBody>
+      </p:sp>
+      <p:sp>
+        <p:nvSpPr>
+          <p:cNvPr id="85" name="TextBox 84"/>
+          <p:cNvSpPr txBox="1"/>
+          <p:nvPr/>
+        </p:nvSpPr>
+        <p:spPr>
+          <a:xfrm>
+            <a:off x="9985248" y="4384548"/>
+            <a:ext cx="1929384" cy="182880"/>
+          </a:xfrm>
+          <a:prstGeom prst="rect">
+            <a:avLst/>
+          </a:prstGeom>
+          <a:noFill/>
+        </p:spPr>
+        <p:txBody>
+          <a:bodyPr wrap="square">
+            <a:spAutoFit/>
+          </a:bodyPr>
+          <a:lstStyle/>
+          <a:p>
+            <a:pPr algn="l"/>
+            <a:r>
+              <a:rPr sz="800" b="0" i="0">
+                <a:solidFill>
+                  <a:srgbClr val="333333"/>
+                </a:solidFill>
+              </a:rPr>
+              <a:t>· TM-40L  Software Engineer</a:t>
+            </a:r>
+          </a:p>
+        </p:txBody>
+      </p:sp>
+      <p:sp>
+        <p:nvSpPr>
+          <p:cNvPr id="86" name="Rectangle 85"/>
           <p:cNvSpPr/>
           <p:nvPr/>
         </p:nvSpPr>
         <p:spPr>
           <a:xfrm>
-            <a:off x="0" y="6565392"/>
-            <a:ext cx="12188952" cy="292608"/>
+            <a:off x="9912096" y="4617720"/>
+            <a:ext cx="2002536" cy="18288"/>
           </a:xfrm>
           <a:prstGeom prst="rect">
             <a:avLst/>
           </a:prstGeom>
           <a:solidFill>
-            <a:srgbClr val="2E3A18"/>
+            <a:srgbClr val="CCCCCC"/>
           </a:solidFill>
           <a:ln>
             <a:noFill/>
@@ -5492,14 +5794,14 @@
       </p:sp>
       <p:sp>
         <p:nvSpPr>
-          <p:cNvPr id="67" name="TextBox 66"/>
+          <p:cNvPr id="87" name="TextBox 86"/>
           <p:cNvSpPr txBox="1"/>
           <p:nvPr/>
         </p:nvSpPr>
         <p:spPr>
           <a:xfrm>
-            <a:off x="182880" y="6574536"/>
-            <a:ext cx="8229600" cy="256032"/>
+            <a:off x="9912096" y="4668012"/>
+            <a:ext cx="2002536" cy="201168"/>
           </a:xfrm>
           <a:prstGeom prst="rect">
             <a:avLst/>
@@ -5512,28 +5814,28 @@
           </a:bodyPr>
           <a:lstStyle/>
           <a:p>
-            <a:pPr algn="ctr"/>
-            <a:r>
-              <a:rPr sz="700" b="0">
-                <a:solidFill>
-                  <a:srgbClr val="A0A0A0"/>
+            <a:pPr algn="l"/>
+            <a:r>
+              <a:rPr sz="850" b="1" i="0">
+                <a:solidFill>
+                  <a:srgbClr val="C8A951"/>
                 </a:solidFill>
               </a:rPr>
-              <a:t>USAREUR-AF OD Team  ·  MSS Training Program  ·  Wiesbaden, Germany</a:t>
-            </a:r>
-          </a:p>
-        </p:txBody>
-      </p:sp>
-      <p:sp>
-        <p:nvSpPr>
-          <p:cNvPr id="68" name="TextBox 67"/>
+              <a:t>TM-50 SERIES  (Prereq: TM-40G–L)</a:t>
+            </a:r>
+          </a:p>
+        </p:txBody>
+      </p:sp>
+      <p:sp>
+        <p:nvSpPr>
+          <p:cNvPr id="88" name="TextBox 87"/>
           <p:cNvSpPr txBox="1"/>
           <p:nvPr/>
         </p:nvSpPr>
         <p:spPr>
           <a:xfrm>
-            <a:off x="9601200" y="6574536"/>
-            <a:ext cx="2377440" cy="256032"/>
+            <a:off x="9912096" y="4887468"/>
+            <a:ext cx="2002536" cy="914400"/>
           </a:xfrm>
           <a:prstGeom prst="rect">
             <a:avLst/>
@@ -5546,14 +5848,17 @@
           </a:bodyPr>
           <a:lstStyle/>
           <a:p>
-            <a:pPr algn="ctr"/>
-            <a:r>
-              <a:rPr sz="700" b="1">
-                <a:solidFill>
-                  <a:srgbClr val="FFC325"/>
+            <a:pPr algn="l"/>
+            <a:r>
+              <a:rPr sz="750" b="0" i="0">
+                <a:solidFill>
+                  <a:srgbClr val="888888"/>
                 </a:solidFill>
               </a:rPr>
-              <a:t>UNCLASSIFIED</a:t>
+              <a:t>Advanced continuation of each
+specialist track (G–L only).
+ORSA · AI Eng · MLE · PM · KM · SWE
+No TM-50 for WFF tracks A–F.</a:t>
             </a:r>
           </a:p>
         </p:txBody>

--- a/maven_training/pdf/MSS_Training_Progression.pptx
+++ b/maven_training/pdf/MSS_Training_Progression.pptx
@@ -4763,7 +4763,7 @@
                   <a:srgbClr val="FFFFFF"/>
                 </a:solidFill>
               </a:rPr>
-              <a:t>17/25-series, S6/G6, G2/G9</a:t>
+              <a:t>17/25-series, S6/G6, G2</a:t>
             </a:r>
           </a:p>
         </p:txBody>
@@ -5062,6 +5062,393 @@
       </p:sp>
       <p:sp>
         <p:nvSpPr>
+          <p:cNvPr id="55" name="TextBox 54"/>
+          <p:cNvSpPr txBox="1"/>
+          <p:nvPr/>
+        </p:nvSpPr>
+        <p:spPr>
+          <a:xfrm>
+            <a:off x="9820656" y="1197864"/>
+            <a:ext cx="2185415" cy="384048"/>
+          </a:xfrm>
+          <a:prstGeom prst="rect">
+            <a:avLst/>
+          </a:prstGeom>
+          <a:noFill/>
+        </p:spPr>
+        <p:txBody>
+          <a:bodyPr wrap="square">
+            <a:spAutoFit/>
+          </a:bodyPr>
+          <a:lstStyle/>
+          <a:p>
+            <a:pPr algn="ctr"/>
+            <a:r>
+              <a:rPr sz="900" b="1">
+                <a:solidFill>
+                  <a:srgbClr val="FFFFFF"/>
+                </a:solidFill>
+              </a:rPr>
+              <a:t>SPECIALIST TRACKS</a:t>
+            </a:r>
+          </a:p>
+        </p:txBody>
+      </p:sp>
+      <p:sp>
+        <p:nvSpPr>
+          <p:cNvPr id="56" name="TextBox 55"/>
+          <p:cNvSpPr txBox="1"/>
+          <p:nvPr/>
+        </p:nvSpPr>
+        <p:spPr>
+          <a:xfrm>
+            <a:off x="9912096" y="1737360"/>
+            <a:ext cx="2048255" cy="256032"/>
+          </a:xfrm>
+          <a:prstGeom prst="rect">
+            <a:avLst/>
+          </a:prstGeom>
+          <a:noFill/>
+        </p:spPr>
+        <p:txBody>
+          <a:bodyPr wrap="square">
+            <a:spAutoFit/>
+          </a:bodyPr>
+          <a:lstStyle/>
+          <a:p>
+            <a:pPr algn="l"/>
+            <a:r>
+              <a:rPr sz="800" b="1">
+                <a:solidFill>
+                  <a:srgbClr val="2E3A18"/>
+                </a:solidFill>
+              </a:rPr>
+              <a:t>TM-40 SERIES  (Prereq: TM-30)</a:t>
+            </a:r>
+          </a:p>
+        </p:txBody>
+      </p:sp>
+      <p:sp>
+        <p:nvSpPr>
+          <p:cNvPr id="57" name="TextBox 56"/>
+          <p:cNvSpPr txBox="1"/>
+          <p:nvPr/>
+        </p:nvSpPr>
+        <p:spPr>
+          <a:xfrm>
+            <a:off x="9912096" y="2011680"/>
+            <a:ext cx="2048255" cy="292608"/>
+          </a:xfrm>
+          <a:prstGeom prst="rect">
+            <a:avLst/>
+          </a:prstGeom>
+          <a:noFill/>
+        </p:spPr>
+        <p:txBody>
+          <a:bodyPr wrap="square">
+            <a:spAutoFit/>
+          </a:bodyPr>
+          <a:lstStyle/>
+          <a:p>
+            <a:pPr algn="l"/>
+            <a:r>
+              <a:rPr sz="750" b="1">
+                <a:solidFill>
+                  <a:srgbClr val="2E3A18"/>
+                </a:solidFill>
+              </a:rPr>
+              <a:t>WFF Tracks (A–F):</a:t>
+            </a:r>
+          </a:p>
+        </p:txBody>
+      </p:sp>
+      <p:sp>
+        <p:nvSpPr>
+          <p:cNvPr id="58" name="TextBox 57"/>
+          <p:cNvSpPr txBox="1"/>
+          <p:nvPr/>
+        </p:nvSpPr>
+        <p:spPr>
+          <a:xfrm>
+            <a:off x="9912096" y="2340864"/>
+            <a:ext cx="2048255" cy="292608"/>
+          </a:xfrm>
+          <a:prstGeom prst="rect">
+            <a:avLst/>
+          </a:prstGeom>
+          <a:noFill/>
+        </p:spPr>
+        <p:txBody>
+          <a:bodyPr wrap="square">
+            <a:spAutoFit/>
+          </a:bodyPr>
+          <a:lstStyle/>
+          <a:p>
+            <a:pPr algn="l"/>
+            <a:r>
+              <a:rPr sz="750" b="0">
+                <a:solidFill>
+                  <a:srgbClr val="404040"/>
+                </a:solidFill>
+              </a:rPr>
+              <a:t>  A Intel · B Fires · C M&amp;M</a:t>
+            </a:r>
+          </a:p>
+        </p:txBody>
+      </p:sp>
+      <p:sp>
+        <p:nvSpPr>
+          <p:cNvPr id="59" name="TextBox 58"/>
+          <p:cNvSpPr txBox="1"/>
+          <p:nvPr/>
+        </p:nvSpPr>
+        <p:spPr>
+          <a:xfrm>
+            <a:off x="9912096" y="2670048"/>
+            <a:ext cx="2048255" cy="292608"/>
+          </a:xfrm>
+          <a:prstGeom prst="rect">
+            <a:avLst/>
+          </a:prstGeom>
+          <a:noFill/>
+        </p:spPr>
+        <p:txBody>
+          <a:bodyPr wrap="square">
+            <a:spAutoFit/>
+          </a:bodyPr>
+          <a:lstStyle/>
+          <a:p>
+            <a:pPr algn="l"/>
+            <a:r>
+              <a:rPr sz="750" b="0">
+                <a:solidFill>
+                  <a:srgbClr val="404040"/>
+                </a:solidFill>
+              </a:rPr>
+              <a:t>  D Sust · E Prot · F MC</a:t>
+            </a:r>
+          </a:p>
+        </p:txBody>
+      </p:sp>
+      <p:sp>
+        <p:nvSpPr>
+          <p:cNvPr id="60" name="TextBox 59"/>
+          <p:cNvSpPr txBox="1"/>
+          <p:nvPr/>
+        </p:nvSpPr>
+        <p:spPr>
+          <a:xfrm>
+            <a:off x="9912096" y="2999232"/>
+            <a:ext cx="2048255" cy="292608"/>
+          </a:xfrm>
+          <a:prstGeom prst="rect">
+            <a:avLst/>
+          </a:prstGeom>
+          <a:noFill/>
+        </p:spPr>
+        <p:txBody>
+          <a:bodyPr wrap="square">
+            <a:spAutoFit/>
+          </a:bodyPr>
+          <a:lstStyle/>
+          <a:p>
+            <a:pPr algn="l"/>
+            <a:r>
+              <a:rPr sz="750" b="1">
+                <a:solidFill>
+                  <a:srgbClr val="2E3A18"/>
+                </a:solidFill>
+              </a:rPr>
+              <a:t>Specialist Tracks (G–L):</a:t>
+            </a:r>
+          </a:p>
+        </p:txBody>
+      </p:sp>
+      <p:sp>
+        <p:nvSpPr>
+          <p:cNvPr id="61" name="TextBox 60"/>
+          <p:cNvSpPr txBox="1"/>
+          <p:nvPr/>
+        </p:nvSpPr>
+        <p:spPr>
+          <a:xfrm>
+            <a:off x="9912096" y="3328416"/>
+            <a:ext cx="2048255" cy="292608"/>
+          </a:xfrm>
+          <a:prstGeom prst="rect">
+            <a:avLst/>
+          </a:prstGeom>
+          <a:noFill/>
+        </p:spPr>
+        <p:txBody>
+          <a:bodyPr wrap="square">
+            <a:spAutoFit/>
+          </a:bodyPr>
+          <a:lstStyle/>
+          <a:p>
+            <a:pPr algn="l"/>
+            <a:r>
+              <a:rPr sz="750" b="0">
+                <a:solidFill>
+                  <a:srgbClr val="404040"/>
+                </a:solidFill>
+              </a:rPr>
+              <a:t>  G ORSA · H AI Eng · I MLE</a:t>
+            </a:r>
+          </a:p>
+        </p:txBody>
+      </p:sp>
+      <p:sp>
+        <p:nvSpPr>
+          <p:cNvPr id="62" name="TextBox 61"/>
+          <p:cNvSpPr txBox="1"/>
+          <p:nvPr/>
+        </p:nvSpPr>
+        <p:spPr>
+          <a:xfrm>
+            <a:off x="9912096" y="3657600"/>
+            <a:ext cx="2048255" cy="292608"/>
+          </a:xfrm>
+          <a:prstGeom prst="rect">
+            <a:avLst/>
+          </a:prstGeom>
+          <a:noFill/>
+        </p:spPr>
+        <p:txBody>
+          <a:bodyPr wrap="square">
+            <a:spAutoFit/>
+          </a:bodyPr>
+          <a:lstStyle/>
+          <a:p>
+            <a:pPr algn="l"/>
+            <a:r>
+              <a:rPr sz="750" b="0">
+                <a:solidFill>
+                  <a:srgbClr val="404040"/>
+                </a:solidFill>
+              </a:rPr>
+              <a:t>  J PM · K KM · L SWE</a:t>
+            </a:r>
+          </a:p>
+        </p:txBody>
+      </p:sp>
+      <p:sp>
+        <p:nvSpPr>
+          <p:cNvPr id="63" name="Rectangle 62"/>
+          <p:cNvSpPr/>
+          <p:nvPr/>
+        </p:nvSpPr>
+        <p:spPr>
+          <a:xfrm>
+            <a:off x="9912096" y="4069080"/>
+            <a:ext cx="2002535" cy="36576"/>
+          </a:xfrm>
+          <a:prstGeom prst="rect">
+            <a:avLst/>
+          </a:prstGeom>
+          <a:solidFill>
+            <a:srgbClr val="A0A0A0"/>
+          </a:solidFill>
+          <a:ln>
+            <a:noFill/>
+          </a:ln>
+        </p:spPr>
+        <p:style>
+          <a:lnRef idx="1">
+            <a:schemeClr val="accent1"/>
+          </a:lnRef>
+          <a:fillRef idx="3">
+            <a:schemeClr val="accent1"/>
+          </a:fillRef>
+          <a:effectRef idx="2">
+            <a:schemeClr val="accent1"/>
+          </a:effectRef>
+          <a:fontRef idx="minor">
+            <a:schemeClr val="lt1"/>
+          </a:fontRef>
+        </p:style>
+        <p:txBody>
+          <a:bodyPr rtlCol="0" anchor="ctr"/>
+          <a:lstStyle/>
+          <a:p>
+            <a:pPr algn="ctr"/>
+          </a:p>
+        </p:txBody>
+      </p:sp>
+      <p:sp>
+        <p:nvSpPr>
+          <p:cNvPr id="64" name="TextBox 63"/>
+          <p:cNvSpPr txBox="1"/>
+          <p:nvPr/>
+        </p:nvSpPr>
+        <p:spPr>
+          <a:xfrm>
+            <a:off x="9912096" y="4178808"/>
+            <a:ext cx="2048255" cy="256032"/>
+          </a:xfrm>
+          <a:prstGeom prst="rect">
+            <a:avLst/>
+          </a:prstGeom>
+          <a:noFill/>
+        </p:spPr>
+        <p:txBody>
+          <a:bodyPr wrap="square">
+            <a:spAutoFit/>
+          </a:bodyPr>
+          <a:lstStyle/>
+          <a:p>
+            <a:pPr algn="l"/>
+            <a:r>
+              <a:rPr sz="800" b="1">
+                <a:solidFill>
+                  <a:srgbClr val="2E3A18"/>
+                </a:solidFill>
+              </a:rPr>
+              <a:t>TM-50 SERIES  (Prereq: TM-40)</a:t>
+            </a:r>
+          </a:p>
+        </p:txBody>
+      </p:sp>
+      <p:sp>
+        <p:nvSpPr>
+          <p:cNvPr id="65" name="TextBox 64"/>
+          <p:cNvSpPr txBox="1"/>
+          <p:nvPr/>
+        </p:nvSpPr>
+        <p:spPr>
+          <a:xfrm>
+            <a:off x="9912096" y="4453128"/>
+            <a:ext cx="2048255" cy="1463040"/>
+          </a:xfrm>
+          <a:prstGeom prst="rect">
+            <a:avLst/>
+          </a:prstGeom>
+          <a:noFill/>
+        </p:spPr>
+        <p:txBody>
+          <a:bodyPr wrap="square">
+            <a:spAutoFit/>
+          </a:bodyPr>
+          <a:lstStyle/>
+          <a:p>
+            <a:pPr algn="l"/>
+            <a:r>
+              <a:rPr sz="750" b="0">
+                <a:solidFill>
+                  <a:srgbClr val="404040"/>
+                </a:solidFill>
+              </a:rPr>
+              <a:t>Advanced / expert-level continuation
+for each TM-40G–L track.
+Focus: production pipelines,
+MLOps, AIP Agents, advanced
+Ontology patterns.</a:t>
+            </a:r>
+          </a:p>
+        </p:txBody>
+      </p:sp>
+      <p:sp>
+        <p:nvSpPr>
           <p:cNvPr id="66" name="Rectangle 65"/>
           <p:cNvSpPr/>
           <p:nvPr/>
@@ -5167,698 +5554,6 @@
                 </a:solidFill>
               </a:rPr>
               <a:t>UNCLASSIFIED</a:t>
-            </a:r>
-          </a:p>
-        </p:txBody>
-      </p:sp>
-      <p:sp>
-        <p:nvSpPr>
-          <p:cNvPr id="69" name="TextBox 68"/>
-          <p:cNvSpPr txBox="1"/>
-          <p:nvPr/>
-        </p:nvSpPr>
-        <p:spPr>
-          <a:xfrm>
-            <a:off x="9866376" y="1175004"/>
-            <a:ext cx="2093976" cy="292608"/>
-          </a:xfrm>
-          <a:prstGeom prst="rect">
-            <a:avLst/>
-          </a:prstGeom>
-          <a:noFill/>
-        </p:spPr>
-        <p:txBody>
-          <a:bodyPr wrap="square">
-            <a:spAutoFit/>
-          </a:bodyPr>
-          <a:lstStyle/>
-          <a:p>
-            <a:pPr algn="ctr"/>
-            <a:r>
-              <a:rPr sz="1100" b="1" i="0">
-                <a:solidFill>
-                  <a:srgbClr val="FFFFFF"/>
-                </a:solidFill>
-              </a:rPr>
-              <a:t>SPECIALIST TRACKS</a:t>
-            </a:r>
-          </a:p>
-        </p:txBody>
-      </p:sp>
-      <p:sp>
-        <p:nvSpPr>
-          <p:cNvPr id="70" name="TextBox 69"/>
-          <p:cNvSpPr txBox="1"/>
-          <p:nvPr/>
-        </p:nvSpPr>
-        <p:spPr>
-          <a:xfrm>
-            <a:off x="9866376" y="1444752"/>
-            <a:ext cx="2093976" cy="201168"/>
-          </a:xfrm>
-          <a:prstGeom prst="rect">
-            <a:avLst/>
-          </a:prstGeom>
-          <a:noFill/>
-        </p:spPr>
-        <p:txBody>
-          <a:bodyPr wrap="square">
-            <a:spAutoFit/>
-          </a:bodyPr>
-          <a:lstStyle/>
-          <a:p>
-            <a:pPr algn="ctr"/>
-            <a:r>
-              <a:rPr sz="800" b="0" i="1">
-                <a:solidFill>
-                  <a:srgbClr val="DDCCAA"/>
-                </a:solidFill>
-              </a:rPr>
-              <a:t>TM-40 &amp; TM-50 Series</a:t>
-            </a:r>
-          </a:p>
-        </p:txBody>
-      </p:sp>
-      <p:sp>
-        <p:nvSpPr>
-          <p:cNvPr id="71" name="TextBox 70"/>
-          <p:cNvSpPr txBox="1"/>
-          <p:nvPr/>
-        </p:nvSpPr>
-        <p:spPr>
-          <a:xfrm>
-            <a:off x="9912096" y="1709928"/>
-            <a:ext cx="2002536" cy="201168"/>
-          </a:xfrm>
-          <a:prstGeom prst="rect">
-            <a:avLst/>
-          </a:prstGeom>
-          <a:noFill/>
-        </p:spPr>
-        <p:txBody>
-          <a:bodyPr wrap="square">
-            <a:spAutoFit/>
-          </a:bodyPr>
-          <a:lstStyle/>
-          <a:p>
-            <a:pPr algn="l"/>
-            <a:r>
-              <a:rPr sz="850" b="1" i="0">
-                <a:solidFill>
-                  <a:srgbClr val="C8A951"/>
-                </a:solidFill>
-              </a:rPr>
-              <a:t>TM-40 SERIES  (Prereq: TM-30)</a:t>
-            </a:r>
-          </a:p>
-        </p:txBody>
-      </p:sp>
-      <p:sp>
-        <p:nvSpPr>
-          <p:cNvPr id="72" name="TextBox 71"/>
-          <p:cNvSpPr txBox="1"/>
-          <p:nvPr/>
-        </p:nvSpPr>
-        <p:spPr>
-          <a:xfrm>
-            <a:off x="9912096" y="1929384"/>
-            <a:ext cx="2002536" cy="182880"/>
-          </a:xfrm>
-          <a:prstGeom prst="rect">
-            <a:avLst/>
-          </a:prstGeom>
-          <a:noFill/>
-        </p:spPr>
-        <p:txBody>
-          <a:bodyPr wrap="square">
-            <a:spAutoFit/>
-          </a:bodyPr>
-          <a:lstStyle/>
-          <a:p>
-            <a:pPr algn="l"/>
-            <a:r>
-              <a:rPr sz="800" b="1" i="0">
-                <a:solidFill>
-                  <a:srgbClr val="1A2F4B"/>
-                </a:solidFill>
-              </a:rPr>
-              <a:t>▸ WFF TRACKS (A–F)</a:t>
-            </a:r>
-          </a:p>
-        </p:txBody>
-      </p:sp>
-      <p:sp>
-        <p:nvSpPr>
-          <p:cNvPr id="73" name="TextBox 72"/>
-          <p:cNvSpPr txBox="1"/>
-          <p:nvPr/>
-        </p:nvSpPr>
-        <p:spPr>
-          <a:xfrm>
-            <a:off x="9985248" y="2125980"/>
-            <a:ext cx="1929384" cy="182880"/>
-          </a:xfrm>
-          <a:prstGeom prst="rect">
-            <a:avLst/>
-          </a:prstGeom>
-          <a:noFill/>
-        </p:spPr>
-        <p:txBody>
-          <a:bodyPr wrap="square">
-            <a:spAutoFit/>
-          </a:bodyPr>
-          <a:lstStyle/>
-          <a:p>
-            <a:pPr algn="l"/>
-            <a:r>
-              <a:rPr sz="800" b="0" i="0">
-                <a:solidFill>
-                  <a:srgbClr val="333333"/>
-                </a:solidFill>
-              </a:rPr>
-              <a:t>· TM-40A  Intelligence (INT)</a:t>
-            </a:r>
-          </a:p>
-        </p:txBody>
-      </p:sp>
-      <p:sp>
-        <p:nvSpPr>
-          <p:cNvPr id="74" name="TextBox 73"/>
-          <p:cNvSpPr txBox="1"/>
-          <p:nvPr/>
-        </p:nvSpPr>
-        <p:spPr>
-          <a:xfrm>
-            <a:off x="9985248" y="2308860"/>
-            <a:ext cx="1929384" cy="182880"/>
-          </a:xfrm>
-          <a:prstGeom prst="rect">
-            <a:avLst/>
-          </a:prstGeom>
-          <a:noFill/>
-        </p:spPr>
-        <p:txBody>
-          <a:bodyPr wrap="square">
-            <a:spAutoFit/>
-          </a:bodyPr>
-          <a:lstStyle/>
-          <a:p>
-            <a:pPr algn="l"/>
-            <a:r>
-              <a:rPr sz="800" b="0" i="0">
-                <a:solidFill>
-                  <a:srgbClr val="333333"/>
-                </a:solidFill>
-              </a:rPr>
-              <a:t>· TM-40B  Fires</a:t>
-            </a:r>
-          </a:p>
-        </p:txBody>
-      </p:sp>
-      <p:sp>
-        <p:nvSpPr>
-          <p:cNvPr id="75" name="TextBox 74"/>
-          <p:cNvSpPr txBox="1"/>
-          <p:nvPr/>
-        </p:nvSpPr>
-        <p:spPr>
-          <a:xfrm>
-            <a:off x="9985248" y="2491740"/>
-            <a:ext cx="1929384" cy="182880"/>
-          </a:xfrm>
-          <a:prstGeom prst="rect">
-            <a:avLst/>
-          </a:prstGeom>
-          <a:noFill/>
-        </p:spPr>
-        <p:txBody>
-          <a:bodyPr wrap="square">
-            <a:spAutoFit/>
-          </a:bodyPr>
-          <a:lstStyle/>
-          <a:p>
-            <a:pPr algn="l"/>
-            <a:r>
-              <a:rPr sz="800" b="0" i="0">
-                <a:solidFill>
-                  <a:srgbClr val="333333"/>
-                </a:solidFill>
-              </a:rPr>
-              <a:t>· TM-40C  Movement &amp; Maneuver</a:t>
-            </a:r>
-          </a:p>
-        </p:txBody>
-      </p:sp>
-      <p:sp>
-        <p:nvSpPr>
-          <p:cNvPr id="76" name="TextBox 75"/>
-          <p:cNvSpPr txBox="1"/>
-          <p:nvPr/>
-        </p:nvSpPr>
-        <p:spPr>
-          <a:xfrm>
-            <a:off x="9985248" y="2674620"/>
-            <a:ext cx="1929384" cy="182880"/>
-          </a:xfrm>
-          <a:prstGeom prst="rect">
-            <a:avLst/>
-          </a:prstGeom>
-          <a:noFill/>
-        </p:spPr>
-        <p:txBody>
-          <a:bodyPr wrap="square">
-            <a:spAutoFit/>
-          </a:bodyPr>
-          <a:lstStyle/>
-          <a:p>
-            <a:pPr algn="l"/>
-            <a:r>
-              <a:rPr sz="800" b="0" i="0">
-                <a:solidFill>
-                  <a:srgbClr val="333333"/>
-                </a:solidFill>
-              </a:rPr>
-              <a:t>· TM-40D  Sustainment</a:t>
-            </a:r>
-          </a:p>
-        </p:txBody>
-      </p:sp>
-      <p:sp>
-        <p:nvSpPr>
-          <p:cNvPr id="77" name="TextBox 76"/>
-          <p:cNvSpPr txBox="1"/>
-          <p:nvPr/>
-        </p:nvSpPr>
-        <p:spPr>
-          <a:xfrm>
-            <a:off x="9985248" y="2857500"/>
-            <a:ext cx="1929384" cy="182880"/>
-          </a:xfrm>
-          <a:prstGeom prst="rect">
-            <a:avLst/>
-          </a:prstGeom>
-          <a:noFill/>
-        </p:spPr>
-        <p:txBody>
-          <a:bodyPr wrap="square">
-            <a:spAutoFit/>
-          </a:bodyPr>
-          <a:lstStyle/>
-          <a:p>
-            <a:pPr algn="l"/>
-            <a:r>
-              <a:rPr sz="800" b="0" i="0">
-                <a:solidFill>
-                  <a:srgbClr val="333333"/>
-                </a:solidFill>
-              </a:rPr>
-              <a:t>· TM-40E  Protection</a:t>
-            </a:r>
-          </a:p>
-        </p:txBody>
-      </p:sp>
-      <p:sp>
-        <p:nvSpPr>
-          <p:cNvPr id="78" name="TextBox 77"/>
-          <p:cNvSpPr txBox="1"/>
-          <p:nvPr/>
-        </p:nvSpPr>
-        <p:spPr>
-          <a:xfrm>
-            <a:off x="9985248" y="3040380"/>
-            <a:ext cx="1929384" cy="182880"/>
-          </a:xfrm>
-          <a:prstGeom prst="rect">
-            <a:avLst/>
-          </a:prstGeom>
-          <a:noFill/>
-        </p:spPr>
-        <p:txBody>
-          <a:bodyPr wrap="square">
-            <a:spAutoFit/>
-          </a:bodyPr>
-          <a:lstStyle/>
-          <a:p>
-            <a:pPr algn="l"/>
-            <a:r>
-              <a:rPr sz="800" b="0" i="0">
-                <a:solidFill>
-                  <a:srgbClr val="333333"/>
-                </a:solidFill>
-              </a:rPr>
-              <a:t>· TM-40F  Mission Command</a:t>
-            </a:r>
-          </a:p>
-        </p:txBody>
-      </p:sp>
-      <p:sp>
-        <p:nvSpPr>
-          <p:cNvPr id="79" name="TextBox 78"/>
-          <p:cNvSpPr txBox="1"/>
-          <p:nvPr/>
-        </p:nvSpPr>
-        <p:spPr>
-          <a:xfrm>
-            <a:off x="9912096" y="3273552"/>
-            <a:ext cx="2002536" cy="182880"/>
-          </a:xfrm>
-          <a:prstGeom prst="rect">
-            <a:avLst/>
-          </a:prstGeom>
-          <a:noFill/>
-        </p:spPr>
-        <p:txBody>
-          <a:bodyPr wrap="square">
-            <a:spAutoFit/>
-          </a:bodyPr>
-          <a:lstStyle/>
-          <a:p>
-            <a:pPr algn="l"/>
-            <a:r>
-              <a:rPr sz="800" b="1" i="0">
-                <a:solidFill>
-                  <a:srgbClr val="1A2F4B"/>
-                </a:solidFill>
-              </a:rPr>
-              <a:t>▸ SPECIALIST (G–L)</a:t>
-            </a:r>
-          </a:p>
-        </p:txBody>
-      </p:sp>
-      <p:sp>
-        <p:nvSpPr>
-          <p:cNvPr id="80" name="TextBox 79"/>
-          <p:cNvSpPr txBox="1"/>
-          <p:nvPr/>
-        </p:nvSpPr>
-        <p:spPr>
-          <a:xfrm>
-            <a:off x="9985248" y="3470148"/>
-            <a:ext cx="1929384" cy="182880"/>
-          </a:xfrm>
-          <a:prstGeom prst="rect">
-            <a:avLst/>
-          </a:prstGeom>
-          <a:noFill/>
-        </p:spPr>
-        <p:txBody>
-          <a:bodyPr wrap="square">
-            <a:spAutoFit/>
-          </a:bodyPr>
-          <a:lstStyle/>
-          <a:p>
-            <a:pPr algn="l"/>
-            <a:r>
-              <a:rPr sz="800" b="0" i="0">
-                <a:solidFill>
-                  <a:srgbClr val="333333"/>
-                </a:solidFill>
-              </a:rPr>
-              <a:t>· TM-40G  ORSA</a:t>
-            </a:r>
-          </a:p>
-        </p:txBody>
-      </p:sp>
-      <p:sp>
-        <p:nvSpPr>
-          <p:cNvPr id="81" name="TextBox 80"/>
-          <p:cNvSpPr txBox="1"/>
-          <p:nvPr/>
-        </p:nvSpPr>
-        <p:spPr>
-          <a:xfrm>
-            <a:off x="9985248" y="3653028"/>
-            <a:ext cx="1929384" cy="182880"/>
-          </a:xfrm>
-          <a:prstGeom prst="rect">
-            <a:avLst/>
-          </a:prstGeom>
-          <a:noFill/>
-        </p:spPr>
-        <p:txBody>
-          <a:bodyPr wrap="square">
-            <a:spAutoFit/>
-          </a:bodyPr>
-          <a:lstStyle/>
-          <a:p>
-            <a:pPr algn="l"/>
-            <a:r>
-              <a:rPr sz="800" b="0" i="0">
-                <a:solidFill>
-                  <a:srgbClr val="333333"/>
-                </a:solidFill>
-              </a:rPr>
-              <a:t>· TM-40H  AI Engineer</a:t>
-            </a:r>
-          </a:p>
-        </p:txBody>
-      </p:sp>
-      <p:sp>
-        <p:nvSpPr>
-          <p:cNvPr id="82" name="TextBox 81"/>
-          <p:cNvSpPr txBox="1"/>
-          <p:nvPr/>
-        </p:nvSpPr>
-        <p:spPr>
-          <a:xfrm>
-            <a:off x="9985248" y="3835908"/>
-            <a:ext cx="1929384" cy="182880"/>
-          </a:xfrm>
-          <a:prstGeom prst="rect">
-            <a:avLst/>
-          </a:prstGeom>
-          <a:noFill/>
-        </p:spPr>
-        <p:txBody>
-          <a:bodyPr wrap="square">
-            <a:spAutoFit/>
-          </a:bodyPr>
-          <a:lstStyle/>
-          <a:p>
-            <a:pPr algn="l"/>
-            <a:r>
-              <a:rPr sz="800" b="0" i="0">
-                <a:solidFill>
-                  <a:srgbClr val="333333"/>
-                </a:solidFill>
-              </a:rPr>
-              <a:t>· TM-40I  ML Engineer</a:t>
-            </a:r>
-          </a:p>
-        </p:txBody>
-      </p:sp>
-      <p:sp>
-        <p:nvSpPr>
-          <p:cNvPr id="83" name="TextBox 82"/>
-          <p:cNvSpPr txBox="1"/>
-          <p:nvPr/>
-        </p:nvSpPr>
-        <p:spPr>
-          <a:xfrm>
-            <a:off x="9985248" y="4018788"/>
-            <a:ext cx="1929384" cy="182880"/>
-          </a:xfrm>
-          <a:prstGeom prst="rect">
-            <a:avLst/>
-          </a:prstGeom>
-          <a:noFill/>
-        </p:spPr>
-        <p:txBody>
-          <a:bodyPr wrap="square">
-            <a:spAutoFit/>
-          </a:bodyPr>
-          <a:lstStyle/>
-          <a:p>
-            <a:pPr algn="l"/>
-            <a:r>
-              <a:rPr sz="800" b="0" i="0">
-                <a:solidFill>
-                  <a:srgbClr val="333333"/>
-                </a:solidFill>
-              </a:rPr>
-              <a:t>· TM-40J  Program Manager</a:t>
-            </a:r>
-          </a:p>
-        </p:txBody>
-      </p:sp>
-      <p:sp>
-        <p:nvSpPr>
-          <p:cNvPr id="84" name="TextBox 83"/>
-          <p:cNvSpPr txBox="1"/>
-          <p:nvPr/>
-        </p:nvSpPr>
-        <p:spPr>
-          <a:xfrm>
-            <a:off x="9985248" y="4201668"/>
-            <a:ext cx="1929384" cy="182880"/>
-          </a:xfrm>
-          <a:prstGeom prst="rect">
-            <a:avLst/>
-          </a:prstGeom>
-          <a:noFill/>
-        </p:spPr>
-        <p:txBody>
-          <a:bodyPr wrap="square">
-            <a:spAutoFit/>
-          </a:bodyPr>
-          <a:lstStyle/>
-          <a:p>
-            <a:pPr algn="l"/>
-            <a:r>
-              <a:rPr sz="800" b="0" i="0">
-                <a:solidFill>
-                  <a:srgbClr val="333333"/>
-                </a:solidFill>
-              </a:rPr>
-              <a:t>· TM-40K  Knowledge Mgr</a:t>
-            </a:r>
-          </a:p>
-        </p:txBody>
-      </p:sp>
-      <p:sp>
-        <p:nvSpPr>
-          <p:cNvPr id="85" name="TextBox 84"/>
-          <p:cNvSpPr txBox="1"/>
-          <p:nvPr/>
-        </p:nvSpPr>
-        <p:spPr>
-          <a:xfrm>
-            <a:off x="9985248" y="4384548"/>
-            <a:ext cx="1929384" cy="182880"/>
-          </a:xfrm>
-          <a:prstGeom prst="rect">
-            <a:avLst/>
-          </a:prstGeom>
-          <a:noFill/>
-        </p:spPr>
-        <p:txBody>
-          <a:bodyPr wrap="square">
-            <a:spAutoFit/>
-          </a:bodyPr>
-          <a:lstStyle/>
-          <a:p>
-            <a:pPr algn="l"/>
-            <a:r>
-              <a:rPr sz="800" b="0" i="0">
-                <a:solidFill>
-                  <a:srgbClr val="333333"/>
-                </a:solidFill>
-              </a:rPr>
-              <a:t>· TM-40L  Software Engineer</a:t>
-            </a:r>
-          </a:p>
-        </p:txBody>
-      </p:sp>
-      <p:sp>
-        <p:nvSpPr>
-          <p:cNvPr id="86" name="Rectangle 85"/>
-          <p:cNvSpPr/>
-          <p:nvPr/>
-        </p:nvSpPr>
-        <p:spPr>
-          <a:xfrm>
-            <a:off x="9912096" y="4617720"/>
-            <a:ext cx="2002536" cy="18288"/>
-          </a:xfrm>
-          <a:prstGeom prst="rect">
-            <a:avLst/>
-          </a:prstGeom>
-          <a:solidFill>
-            <a:srgbClr val="CCCCCC"/>
-          </a:solidFill>
-          <a:ln>
-            <a:noFill/>
-          </a:ln>
-        </p:spPr>
-        <p:style>
-          <a:lnRef idx="1">
-            <a:schemeClr val="accent1"/>
-          </a:lnRef>
-          <a:fillRef idx="3">
-            <a:schemeClr val="accent1"/>
-          </a:fillRef>
-          <a:effectRef idx="2">
-            <a:schemeClr val="accent1"/>
-          </a:effectRef>
-          <a:fontRef idx="minor">
-            <a:schemeClr val="lt1"/>
-          </a:fontRef>
-        </p:style>
-        <p:txBody>
-          <a:bodyPr rtlCol="0" anchor="ctr"/>
-          <a:lstStyle/>
-          <a:p>
-            <a:pPr algn="ctr"/>
-          </a:p>
-        </p:txBody>
-      </p:sp>
-      <p:sp>
-        <p:nvSpPr>
-          <p:cNvPr id="87" name="TextBox 86"/>
-          <p:cNvSpPr txBox="1"/>
-          <p:nvPr/>
-        </p:nvSpPr>
-        <p:spPr>
-          <a:xfrm>
-            <a:off x="9912096" y="4668012"/>
-            <a:ext cx="2002536" cy="201168"/>
-          </a:xfrm>
-          <a:prstGeom prst="rect">
-            <a:avLst/>
-          </a:prstGeom>
-          <a:noFill/>
-        </p:spPr>
-        <p:txBody>
-          <a:bodyPr wrap="square">
-            <a:spAutoFit/>
-          </a:bodyPr>
-          <a:lstStyle/>
-          <a:p>
-            <a:pPr algn="l"/>
-            <a:r>
-              <a:rPr sz="850" b="1" i="0">
-                <a:solidFill>
-                  <a:srgbClr val="C8A951"/>
-                </a:solidFill>
-              </a:rPr>
-              <a:t>TM-50 SERIES  (Prereq: TM-40G–L)</a:t>
-            </a:r>
-          </a:p>
-        </p:txBody>
-      </p:sp>
-      <p:sp>
-        <p:nvSpPr>
-          <p:cNvPr id="88" name="TextBox 87"/>
-          <p:cNvSpPr txBox="1"/>
-          <p:nvPr/>
-        </p:nvSpPr>
-        <p:spPr>
-          <a:xfrm>
-            <a:off x="9912096" y="4887468"/>
-            <a:ext cx="2002536" cy="914400"/>
-          </a:xfrm>
-          <a:prstGeom prst="rect">
-            <a:avLst/>
-          </a:prstGeom>
-          <a:noFill/>
-        </p:spPr>
-        <p:txBody>
-          <a:bodyPr wrap="square">
-            <a:spAutoFit/>
-          </a:bodyPr>
-          <a:lstStyle/>
-          <a:p>
-            <a:pPr algn="l"/>
-            <a:r>
-              <a:rPr sz="750" b="0" i="0">
-                <a:solidFill>
-                  <a:srgbClr val="888888"/>
-                </a:solidFill>
-              </a:rPr>
-              <a:t>Advanced continuation of each
-specialist track (G–L only).
-ORSA · AI Eng · MLE · PM · KM · SWE
-No TM-50 for WFF tracks A–F.</a:t>
             </a:r>
           </a:p>
         </p:txBody>
